--- a/pptx/01.pptx
+++ b/pptx/01.pptx
@@ -8531,7 +8531,7 @@
                 <a:latin typeface="Calibri"/>
                 <a:ea typeface="Calibri"/>
               </a:rPr>
-              <a:t>yongkyun.daniel.lee@gmail.com  |  linkedin.com/in/yongkyunlee</a:t>
+              <a:t>yongkyun.daniel.lee@gmail.com  |  linkedin.com/in/yongkyunlee  |  noninertialframe.com</a:t>
             </a:r>
             <a:endParaRPr b="0" lang="en-US" sz="1100" strike="noStrike" u="none">
               <a:solidFill>
@@ -8553,7 +8553,7 @@
         <p:spPr>
           <a:xfrm>
             <a:off x="1188720" y="1005840"/>
-            <a:ext cx="27432" cy="2560320"/>
+            <a:ext cx="27432" cy="2400000"/>
           </a:xfrm>
           <a:prstGeom prst="rect">
             <a:avLst/>
@@ -8638,7 +8638,7 @@
                 <a:latin typeface="TrebuchetMS-Bold"/>
                 <a:ea typeface="TrebuchetMS-Bold"/>
               </a:rPr>
-              <a:t>MS Computer Science</a:t>
+              <a:t>B.S. Computer Science, Caltech (GPA 4.0)</a:t>
             </a:r>
             <a:endParaRPr b="0" lang="en-US" sz="1400" strike="noStrike" u="none">
               <a:solidFill>
@@ -8660,7 +8660,7 @@
                 <a:latin typeface="Calibri"/>
                 <a:ea typeface="Calibri"/>
               </a:rPr>
-              <a:t>Interested in applied AI/ML and building intelligent systems</a:t>
+              <a:t>Head TA for ACM 157 (Statistical Inference) and TA for ACM 116 (Probability Models)</a:t>
             </a:r>
             <a:endParaRPr b="0" lang="en-US" sz="1100" strike="noStrike" u="none">
               <a:solidFill>
@@ -8681,7 +8681,7 @@
         </p:nvSpPr>
         <p:spPr>
           <a:xfrm>
-            <a:off x="1143000" y="2057400"/>
+            <a:off x="1143000" y="1873000"/>
             <a:ext cx="118872" cy="118872"/>
           </a:xfrm>
           <a:prstGeom prst="ellipse">
@@ -8711,7 +8711,7 @@
         </p:nvSpPr>
         <p:spPr>
           <a:xfrm>
-            <a:off x="1508760" y="1965960"/>
+            <a:off x="1508760" y="1781560"/>
             <a:ext cx="7086600" cy="685800"/>
           </a:xfrm>
           <a:prstGeom prst="rect">
@@ -8737,7 +8737,7 @@
                 <a:latin typeface="TrebuchetMS-Bold"/>
                 <a:ea typeface="TrebuchetMS-Bold"/>
               </a:rPr>
-              <a:t>Software Engineer</a:t>
+              <a:t>Software Engineer, Onehouse</a:t>
             </a:r>
             <a:endParaRPr b="0" lang="en-US" sz="1400" strike="noStrike" u="none">
               <a:solidFill>
@@ -8759,7 +8759,7 @@
                 <a:latin typeface="Calibri"/>
                 <a:ea typeface="Calibri"/>
               </a:rPr>
-              <a:t>Experience at startups and tech companies, focused on backend systems and data pipelines</a:t>
+              <a:t>3.5 yrs building data lakehouse platform. Full-stack engineering, read/write optimizations, and data pipelines</a:t>
             </a:r>
             <a:endParaRPr b="0" lang="en-US" sz="1100" strike="noStrike" u="none">
               <a:solidFill>
@@ -8774,13 +8774,13 @@
       </p:sp>
       <p:sp>
         <p:nvSpPr>
-          <p:cNvPr id="37" name=""/>
+          <p:cNvPr id="40" name=""/>
           <p:cNvSpPr/>
           <p:nvPr/>
         </p:nvSpPr>
         <p:spPr>
           <a:xfrm>
-            <a:off x="1143000" y="2971800"/>
+            <a:off x="1143000" y="2603000"/>
             <a:ext cx="118872" cy="118872"/>
           </a:xfrm>
           <a:prstGeom prst="ellipse">
@@ -8804,13 +8804,13 @@
       </p:sp>
       <p:sp>
         <p:nvSpPr>
-          <p:cNvPr id="38" name=""/>
-          <p:cNvSpPr txBox="1"/>
-          <p:nvPr/>
-        </p:nvSpPr>
-        <p:spPr>
-          <a:xfrm>
-            <a:off x="1508760" y="2880360"/>
+          <p:cNvPr id="41" name=""/>
+          <p:cNvSpPr txBox="1"/>
+          <p:nvPr/>
+        </p:nvSpPr>
+        <p:spPr>
+          <a:xfrm>
+            <a:off x="1508760" y="2511560"/>
             <a:ext cx="7086600" cy="685800"/>
           </a:xfrm>
           <a:prstGeom prst="rect">
@@ -8836,7 +8836,7 @@
                 <a:latin typeface="TrebuchetMS-Bold"/>
                 <a:ea typeface="TrebuchetMS-Bold"/>
               </a:rPr>
-              <a:t>Research Interest</a:t>
+              <a:t>Analyst, Goldman Sachs</a:t>
             </a:r>
             <a:endParaRPr b="0" lang="en-US" sz="1400" strike="noStrike" u="none">
               <a:solidFill>
@@ -8858,6 +8858,105 @@
                 <a:latin typeface="Calibri"/>
                 <a:ea typeface="Calibri"/>
               </a:rPr>
+              <a:t>1 yr in Securities Division. Built real-time pricing and risk analytics systems</a:t>
+            </a:r>
+            <a:endParaRPr b="0" lang="en-US" sz="1100" strike="noStrike" u="none">
+              <a:solidFill>
+                <a:srgbClr val="63738b"/>
+              </a:solidFill>
+              <a:effectLst/>
+              <a:uFillTx/>
+              <a:latin typeface="Arial"/>
+            </a:endParaRPr>
+          </a:p>
+        </p:txBody>
+      </p:sp>
+      <p:sp>
+        <p:nvSpPr>
+          <p:cNvPr id="37" name=""/>
+          <p:cNvSpPr/>
+          <p:nvPr/>
+        </p:nvSpPr>
+        <p:spPr>
+          <a:xfrm>
+            <a:off x="1143000" y="3333000"/>
+            <a:ext cx="118872" cy="118872"/>
+          </a:xfrm>
+          <a:prstGeom prst="ellipse">
+            <a:avLst/>
+          </a:prstGeom>
+          <a:solidFill>
+            <a:srgbClr val="3a82f6"/>
+          </a:solidFill>
+          <a:ln w="0">
+            <a:noFill/>
+          </a:ln>
+        </p:spPr>
+        <p:txBody>
+          <a:bodyPr lIns="90000" rIns="90000" tIns="45000" bIns="45000" anchor="t">
+            <a:noAutofit/>
+          </a:bodyPr>
+          <a:p>
+            <a:endParaRPr lang="en-US"/>
+          </a:p>
+        </p:txBody>
+      </p:sp>
+      <p:sp>
+        <p:nvSpPr>
+          <p:cNvPr id="38" name=""/>
+          <p:cNvSpPr txBox="1"/>
+          <p:nvPr/>
+        </p:nvSpPr>
+        <p:spPr>
+          <a:xfrm>
+            <a:off x="1508760" y="3241560"/>
+            <a:ext cx="7086600" cy="685800"/>
+          </a:xfrm>
+          <a:prstGeom prst="rect">
+            <a:avLst/>
+          </a:prstGeom>
+          <a:noFill/>
+          <a:ln w="0">
+            <a:noFill/>
+          </a:ln>
+        </p:spPr>
+        <p:txBody>
+          <a:bodyPr lIns="90000" rIns="90000" tIns="45000" bIns="45000" anchor="t">
+            <a:spAutoFit/>
+          </a:bodyPr>
+          <a:p>
+            <a:r>
+              <a:rPr b="1" lang="en-US" sz="1400" strike="noStrike" u="none">
+                <a:solidFill>
+                  <a:srgbClr val="3a82f6"/>
+                </a:solidFill>
+                <a:effectLst/>
+                <a:uFillTx/>
+                <a:latin typeface="TrebuchetMS-Bold"/>
+                <a:ea typeface="TrebuchetMS-Bold"/>
+              </a:rPr>
+              <a:t>Research Interest</a:t>
+            </a:r>
+            <a:endParaRPr b="0" lang="en-US" sz="1400" strike="noStrike" u="none">
+              <a:solidFill>
+                <a:srgbClr val="1d283a"/>
+              </a:solidFill>
+              <a:effectLst/>
+              <a:uFillTx/>
+              <a:latin typeface="Arial"/>
+            </a:endParaRPr>
+          </a:p>
+          <a:p>
+            <a:r>
+              <a:rPr b="0" lang="en-US" sz="1100" strike="noStrike" u="none">
+                <a:solidFill>
+                  <a:srgbClr val="63738b"/>
+                </a:solidFill>
+                <a:effectLst/>
+                <a:uFillTx/>
+                <a:latin typeface="Calibri"/>
+                <a:ea typeface="Calibri"/>
+              </a:rPr>
               <a:t>Exploring how AI-generated content can be made more natural and trustworthy for technical audiences</a:t>
             </a:r>
             <a:endParaRPr b="0" lang="en-US" sz="1100" strike="noStrike" u="none">
@@ -8868,6 +8967,166 @@
               <a:uFillTx/>
               <a:latin typeface="Arial"/>
             </a:endParaRPr>
+          </a:p>
+        </p:txBody>
+      </p:sp>
+      <p:sp>
+        <p:nvSpPr>
+          <p:cNvPr id="50" name=""/>
+          <p:cNvSpPr txBox="1"/>
+          <p:nvPr/>
+        </p:nvSpPr>
+        <p:spPr>
+          <a:xfrm>
+            <a:off x="548640" y="1088136"/>
+            <a:ext cx="548640" cy="228600"/>
+          </a:xfrm>
+          <a:prstGeom prst="rect">
+            <a:avLst/>
+          </a:prstGeom>
+          <a:noFill/>
+          <a:ln w="0">
+            <a:noFill/>
+          </a:ln>
+        </p:spPr>
+        <p:txBody>
+          <a:bodyPr lIns="0" rIns="0" tIns="0" bIns="0" anchor="ctr">
+            <a:noAutofit/>
+          </a:bodyPr>
+          <a:p>
+            <a:pPr algn="r"/>
+            <a:r>
+              <a:rPr b="1" lang="en-US" sz="900" strike="noStrike" u="none">
+                <a:solidFill>
+                  <a:srgbClr val="1d283a"/>
+                </a:solidFill>
+                <a:effectLst/>
+                <a:uFillTx/>
+                <a:latin typeface="Calibri"/>
+                <a:ea typeface="Calibri"/>
+              </a:rPr>
+              <a:t>2021</a:t>
+            </a:r>
+          </a:p>
+        </p:txBody>
+      </p:sp>
+      <p:sp>
+        <p:nvSpPr>
+          <p:cNvPr id="51" name=""/>
+          <p:cNvSpPr txBox="1"/>
+          <p:nvPr/>
+        </p:nvSpPr>
+        <p:spPr>
+          <a:xfrm>
+            <a:off x="548640" y="1818136"/>
+            <a:ext cx="548640" cy="228600"/>
+          </a:xfrm>
+          <a:prstGeom prst="rect">
+            <a:avLst/>
+          </a:prstGeom>
+          <a:noFill/>
+          <a:ln w="0">
+            <a:noFill/>
+          </a:ln>
+        </p:spPr>
+        <p:txBody>
+          <a:bodyPr lIns="0" rIns="0" tIns="0" bIns="0" anchor="ctr">
+            <a:noAutofit/>
+          </a:bodyPr>
+          <a:p>
+            <a:pPr algn="r"/>
+            <a:r>
+              <a:rPr b="1" lang="en-US" sz="900" strike="noStrike" u="none">
+                <a:solidFill>
+                  <a:srgbClr val="1d283a"/>
+                </a:solidFill>
+                <a:effectLst/>
+                <a:uFillTx/>
+                <a:latin typeface="Calibri"/>
+                <a:ea typeface="Calibri"/>
+              </a:rPr>
+              <a:t>2022-2026</a:t>
+            </a:r>
+          </a:p>
+        </p:txBody>
+      </p:sp>
+      <p:sp>
+        <p:nvSpPr>
+          <p:cNvPr id="52" name=""/>
+          <p:cNvSpPr txBox="1"/>
+          <p:nvPr/>
+        </p:nvSpPr>
+        <p:spPr>
+          <a:xfrm>
+            <a:off x="548640" y="2548136"/>
+            <a:ext cx="548640" cy="228600"/>
+          </a:xfrm>
+          <a:prstGeom prst="rect">
+            <a:avLst/>
+          </a:prstGeom>
+          <a:noFill/>
+          <a:ln w="0">
+            <a:noFill/>
+          </a:ln>
+        </p:spPr>
+        <p:txBody>
+          <a:bodyPr lIns="0" rIns="0" tIns="0" bIns="0" anchor="ctr">
+            <a:noAutofit/>
+          </a:bodyPr>
+          <a:p>
+            <a:pPr algn="r"/>
+            <a:r>
+              <a:rPr b="1" lang="en-US" sz="900" strike="noStrike" u="none">
+                <a:solidFill>
+                  <a:srgbClr val="1d283a"/>
+                </a:solidFill>
+                <a:effectLst/>
+                <a:uFillTx/>
+                <a:latin typeface="Calibri"/>
+                <a:ea typeface="Calibri"/>
+              </a:rPr>
+              <a:t>2021-2022</a:t>
+            </a:r>
+          </a:p>
+        </p:txBody>
+      </p:sp>
+      <p:sp>
+        <p:nvSpPr>
+          <p:cNvPr id="53" name=""/>
+          <p:cNvSpPr txBox="1"/>
+          <p:nvPr/>
+        </p:nvSpPr>
+        <p:spPr>
+          <a:xfrm>
+            <a:off x="548640" y="3278136"/>
+            <a:ext cx="548640" cy="228600"/>
+          </a:xfrm>
+          <a:prstGeom prst="rect">
+            <a:avLst/>
+          </a:prstGeom>
+          <a:noFill/>
+          <a:ln w="0">
+            <a:noFill/>
+          </a:ln>
+        </p:spPr>
+        <p:txBody>
+          <a:bodyPr lIns="0" rIns="0" tIns="0" bIns="0" anchor="ctr">
+            <a:noAutofit/>
+          </a:bodyPr>
+          <a:p>
+            <a:pPr algn="r"/>
+            <a:r>
+              <a:rPr b="1" lang="en-US" sz="900" strike="noStrike" u="none">
+                <a:solidFill>
+                  <a:srgbClr val="1d283a"/>
+                </a:solidFill>
+                <a:effectLst/>
+                <a:uFillTx/>
+                <a:latin typeface="Calibri"/>
+                <a:ea typeface="Calibri"/>
+              </a:rPr>
+              <a:t>2025</a:t>
+            </a:r>
           </a:p>
         </p:txBody>
       </p:sp>
